--- a/media/resources/files/ButunSandardyJanaOnduktardyKoboytuuBoluu-10-100-1000-TuuraJeKata.pptx
+++ b/media/resources/files/ButunSandardyJanaOnduktardyKoboytuuBoluu-10-100-1000-TuuraJeKata.pptx
@@ -1819,7 +1819,7 @@
                 <a:ea typeface="+mn-ea"/>
                 <a:cs typeface="+mn-cs"/>
               </a:rPr>
-              <a:t>Турдуу пикирлер учун ыраазычылык билдиребиз.</a:t>
+              <a:t>Түрдүү пикирлер үчүн ыраазычылык билдиребиз.</a:t>
             </a:r>
           </a:p>
           <a:p>

--- a/media/resources/files/ButunSandardyJanaOnduktardyKoboytuuBoluu-10-100-1000-TuuraJeKata.pptx
+++ b/media/resources/files/ButunSandardyJanaOnduktardyKoboytuuBoluu-10-100-1000-TuuraJeKata.pptx
@@ -12300,7 +12300,7 @@
             <a:pPr algn="ctr"/>
             <a:r>
               <a:rPr lang="en-GB" sz="2000" dirty="0"/>
-              <a:t>7 ÷ 10 = 0.7</a:t>
+              <a:t>7 ÷ 10 = 0,7</a:t>
             </a:r>
           </a:p>
         </p:txBody>
@@ -12336,7 +12336,7 @@
             <a:pPr algn="ctr"/>
             <a:r>
               <a:rPr lang="en-GB" sz="2000" dirty="0"/>
-              <a:t>920 ÷ 10 = 9.2</a:t>
+              <a:t>920 ÷ 10 = 9,2</a:t>
             </a:r>
           </a:p>
         </p:txBody>
@@ -12372,7 +12372,7 @@
             <a:pPr algn="ctr"/>
             <a:r>
               <a:rPr lang="en-GB" sz="2000" dirty="0"/>
-              <a:t>8 ÷ 100 = 0.08</a:t>
+              <a:t>8 ÷ 100 = 0,08</a:t>
             </a:r>
           </a:p>
         </p:txBody>
@@ -12408,7 +12408,7 @@
             <a:pPr algn="ctr"/>
             <a:r>
               <a:rPr lang="en-GB" sz="2000" dirty="0"/>
-              <a:t>5.1 × 1000 = 5100</a:t>
+              <a:t>5,1 × 1000 = 5100</a:t>
             </a:r>
           </a:p>
         </p:txBody>
@@ -12444,7 +12444,7 @@
             <a:pPr algn="ctr"/>
             <a:r>
               <a:rPr lang="en-GB" sz="2000" dirty="0"/>
-              <a:t>71.8 ÷ 1000 = 0.718</a:t>
+              <a:t>71,8 ÷ 1000 = 0,718</a:t>
             </a:r>
           </a:p>
         </p:txBody>
@@ -12480,7 +12480,7 @@
             <a:pPr algn="ctr"/>
             <a:r>
               <a:rPr lang="en-GB" sz="2000" dirty="0"/>
-              <a:t>4.6 ÷ 10 × 100 = 46</a:t>
+              <a:t>4,6 ÷ 10 × 100 = 46</a:t>
             </a:r>
           </a:p>
         </p:txBody>
@@ -12516,7 +12516,7 @@
             <a:pPr algn="ctr"/>
             <a:r>
               <a:rPr lang="en-GB" sz="2000" dirty="0"/>
-              <a:t>0.18 × 1000 ÷ 10 = 180</a:t>
+              <a:t>0,18 × 1000 ÷ 10 = 180</a:t>
             </a:r>
           </a:p>
         </p:txBody>
@@ -12552,7 +12552,7 @@
             <a:pPr algn="ctr"/>
             <a:r>
               <a:rPr lang="en-GB" sz="2000" dirty="0"/>
-              <a:t>735 ÷ 1000 × 10 = 7.35</a:t>
+              <a:t>735 ÷ 1000 × 10 = 7,35</a:t>
             </a:r>
           </a:p>
         </p:txBody>
@@ -17903,7 +17903,7 @@
             <a:pPr algn="ctr"/>
             <a:r>
               <a:rPr lang="en-GB" sz="2000" dirty="0"/>
-              <a:t>7 ÷ 10 = 0.7</a:t>
+              <a:t>7 ÷ 10 = 0,7</a:t>
             </a:r>
           </a:p>
         </p:txBody>
@@ -17939,7 +17939,7 @@
             <a:pPr algn="ctr"/>
             <a:r>
               <a:rPr lang="en-GB" sz="2000" dirty="0"/>
-              <a:t>920 ÷ 10 = 9.2</a:t>
+              <a:t>920 ÷ 10 = 9,2</a:t>
             </a:r>
           </a:p>
         </p:txBody>
@@ -17975,7 +17975,7 @@
             <a:pPr algn="ctr"/>
             <a:r>
               <a:rPr lang="en-GB" sz="2000" dirty="0"/>
-              <a:t>8 ÷ 100 = 0.08</a:t>
+              <a:t>8 ÷ 100 = 0,08</a:t>
             </a:r>
           </a:p>
         </p:txBody>
@@ -28459,7 +28459,7 @@
             <a:pPr algn="ctr"/>
             <a:r>
               <a:rPr lang="en-GB" sz="2000" dirty="0"/>
-              <a:t>7 ÷ 10 = 0.7</a:t>
+              <a:t>7 ÷ 10 = 0,7</a:t>
             </a:r>
           </a:p>
         </p:txBody>
@@ -28495,7 +28495,7 @@
             <a:pPr algn="ctr"/>
             <a:r>
               <a:rPr lang="en-GB" sz="2000" dirty="0"/>
-              <a:t>920 ÷ 10 = 9.2</a:t>
+              <a:t>920 ÷ 10 = 9,2</a:t>
             </a:r>
           </a:p>
         </p:txBody>
@@ -28531,7 +28531,7 @@
             <a:pPr algn="ctr"/>
             <a:r>
               <a:rPr lang="en-GB" sz="2000" dirty="0"/>
-              <a:t>8 ÷ 100 = 0.08</a:t>
+              <a:t>8 ÷ 100 = 0,08</a:t>
             </a:r>
           </a:p>
         </p:txBody>
@@ -28567,7 +28567,7 @@
             <a:pPr algn="ctr"/>
             <a:r>
               <a:rPr lang="en-GB" sz="2000" dirty="0"/>
-              <a:t>5.1 × 1000 = 5100</a:t>
+              <a:t>5,1 × 1000 = 5100</a:t>
             </a:r>
           </a:p>
         </p:txBody>
@@ -28603,7 +28603,7 @@
             <a:pPr algn="ctr"/>
             <a:r>
               <a:rPr lang="en-GB" sz="2000" dirty="0"/>
-              <a:t>71.8 ÷ 1000 = 0.718</a:t>
+              <a:t>71,8 ÷ 1000 = 0,718</a:t>
             </a:r>
           </a:p>
         </p:txBody>
@@ -28639,7 +28639,7 @@
             <a:pPr algn="ctr"/>
             <a:r>
               <a:rPr lang="en-GB" sz="2000" dirty="0"/>
-              <a:t>4.6 ÷ 10 × 100 = 46</a:t>
+              <a:t>4,6 ÷ 10 × 100 = 46</a:t>
             </a:r>
           </a:p>
         </p:txBody>
@@ -28675,7 +28675,7 @@
             <a:pPr algn="ctr"/>
             <a:r>
               <a:rPr lang="en-GB" sz="2000" dirty="0"/>
-              <a:t>0.18 × 1000 ÷ 10 = 180</a:t>
+              <a:t>0,18 × 1000 ÷ 10 = 180</a:t>
             </a:r>
           </a:p>
         </p:txBody>
@@ -28711,7 +28711,7 @@
             <a:pPr algn="ctr"/>
             <a:r>
               <a:rPr lang="en-GB" sz="2000" dirty="0"/>
-              <a:t>735 ÷ 1000 × 10 = 7.35</a:t>
+              <a:t>735 ÷ 1000 × 10 = 7,35</a:t>
             </a:r>
           </a:p>
         </p:txBody>
@@ -39503,7 +39503,7 @@
             <a:pPr algn="ctr"/>
             <a:r>
               <a:rPr lang="en-GB" sz="2000" dirty="0"/>
-              <a:t>7 ÷ 10 = 0.7</a:t>
+              <a:t>7 ÷ 10 = 0,7</a:t>
             </a:r>
           </a:p>
         </p:txBody>
@@ -39539,7 +39539,7 @@
             <a:pPr algn="ctr"/>
             <a:r>
               <a:rPr lang="en-GB" sz="2000" dirty="0"/>
-              <a:t>920 ÷ 10 = 9.2</a:t>
+              <a:t>920 ÷ 10 = 9,2</a:t>
             </a:r>
           </a:p>
         </p:txBody>
@@ -39575,7 +39575,7 @@
             <a:pPr algn="ctr"/>
             <a:r>
               <a:rPr lang="en-GB" sz="2000" dirty="0"/>
-              <a:t>8 ÷ 100 = 0.08</a:t>
+              <a:t>8 ÷ 100 = 0,08</a:t>
             </a:r>
           </a:p>
         </p:txBody>
@@ -39611,7 +39611,7 @@
             <a:pPr algn="ctr"/>
             <a:r>
               <a:rPr lang="en-GB" sz="2000" dirty="0"/>
-              <a:t>5.1 × 1000 = 5100</a:t>
+              <a:t>5,1 × 1000 = 5100</a:t>
             </a:r>
           </a:p>
         </p:txBody>
@@ -39647,7 +39647,7 @@
             <a:pPr algn="ctr"/>
             <a:r>
               <a:rPr lang="en-GB" sz="2000" dirty="0"/>
-              <a:t>71.8 ÷ 1000 = 0.718</a:t>
+              <a:t>71,8 ÷ 1000 = 0,718</a:t>
             </a:r>
           </a:p>
         </p:txBody>
@@ -39683,7 +39683,7 @@
             <a:pPr algn="ctr"/>
             <a:r>
               <a:rPr lang="en-GB" sz="2000" dirty="0"/>
-              <a:t>4.6 ÷ 10 × 100 = 46</a:t>
+              <a:t>4,6 ÷ 10 × 100 = 46</a:t>
             </a:r>
           </a:p>
         </p:txBody>
@@ -39719,7 +39719,7 @@
             <a:pPr algn="ctr"/>
             <a:r>
               <a:rPr lang="en-GB" sz="2000" dirty="0"/>
-              <a:t>0.18 × 1000 ÷ 10 = 180</a:t>
+              <a:t>0,18 × 1000 ÷ 10 = 180</a:t>
             </a:r>
           </a:p>
         </p:txBody>
@@ -39755,7 +39755,7 @@
             <a:pPr algn="ctr"/>
             <a:r>
               <a:rPr lang="en-GB" sz="2000" dirty="0"/>
-              <a:t>735 ÷ 1000 × 10 = 7.35</a:t>
+              <a:t>735 ÷ 1000 × 10 = 7,35</a:t>
             </a:r>
           </a:p>
         </p:txBody>
@@ -39798,7 +39798,7 @@
             <a:pPr algn="ctr"/>
             <a:r>
               <a:rPr lang="en-GB" sz="2000" dirty="0"/>
-              <a:t>90.2</a:t>
+              <a:t>90,2</a:t>
             </a:r>
           </a:p>
         </p:txBody>
@@ -39927,7 +39927,7 @@
             <a:pPr algn="ctr"/>
             <a:r>
               <a:rPr lang="en-GB" sz="2000" dirty="0"/>
-              <a:t>1.06</a:t>
+              <a:t>1,06</a:t>
             </a:r>
           </a:p>
         </p:txBody>
@@ -39970,7 +39970,7 @@
             <a:pPr algn="ctr"/>
             <a:r>
               <a:rPr lang="en-GB" sz="2000" dirty="0"/>
-              <a:t>0.0718</a:t>
+              <a:t>0,0718</a:t>
             </a:r>
           </a:p>
         </p:txBody>
@@ -50958,7 +50958,7 @@
             <a:pPr algn="ctr"/>
             <a:r>
               <a:rPr lang="en-GB" sz="2000" dirty="0"/>
-              <a:t>7 ÷ 10 = 0.7</a:t>
+              <a:t>7 ÷ 10 = 0,7</a:t>
             </a:r>
           </a:p>
         </p:txBody>
@@ -50994,7 +50994,7 @@
             <a:pPr algn="ctr"/>
             <a:r>
               <a:rPr lang="en-GB" sz="2000" dirty="0"/>
-              <a:t>920 ÷ 10 = 9.2</a:t>
+              <a:t>920 ÷ 10 = 9,2</a:t>
             </a:r>
           </a:p>
         </p:txBody>
@@ -51030,7 +51030,7 @@
             <a:pPr algn="ctr"/>
             <a:r>
               <a:rPr lang="en-GB" sz="2000" dirty="0"/>
-              <a:t>8 ÷ 100 = 0.08</a:t>
+              <a:t>8 ÷ 100 = 0,08</a:t>
             </a:r>
           </a:p>
         </p:txBody>
@@ -51066,7 +51066,7 @@
             <a:pPr algn="ctr"/>
             <a:r>
               <a:rPr lang="en-GB" sz="2000" dirty="0"/>
-              <a:t>5.1 × 1000 = 5100</a:t>
+              <a:t>5,1 × 1000 = 5100</a:t>
             </a:r>
           </a:p>
         </p:txBody>
@@ -51102,7 +51102,7 @@
             <a:pPr algn="ctr"/>
             <a:r>
               <a:rPr lang="en-GB" sz="2000" dirty="0"/>
-              <a:t>71.8 ÷ 1000 = 0.718</a:t>
+              <a:t>71,8 ÷ 1000 = 0,718</a:t>
             </a:r>
           </a:p>
         </p:txBody>
@@ -51138,7 +51138,7 @@
             <a:pPr algn="ctr"/>
             <a:r>
               <a:rPr lang="en-GB" sz="2000" dirty="0"/>
-              <a:t>4.6 ÷ 10 × 100 = 46</a:t>
+              <a:t>4,6 ÷ 10 × 100 = 46</a:t>
             </a:r>
           </a:p>
         </p:txBody>
@@ -51174,7 +51174,7 @@
             <a:pPr algn="ctr"/>
             <a:r>
               <a:rPr lang="en-GB" sz="2000" dirty="0"/>
-              <a:t>0.18 × 1000 ÷ 10 = 180</a:t>
+              <a:t>0,18 × 1000 ÷ 10 = 180</a:t>
             </a:r>
           </a:p>
         </p:txBody>
@@ -51210,7 +51210,7 @@
             <a:pPr algn="ctr"/>
             <a:r>
               <a:rPr lang="en-GB" sz="2000" dirty="0"/>
-              <a:t>735 ÷ 1000 × 10 = 7.35</a:t>
+              <a:t>735 ÷ 1000 × 10 = 7,35</a:t>
             </a:r>
           </a:p>
         </p:txBody>
